--- a/docs/PPT/01-business-architecture.pptx
+++ b/docs/PPT/01-business-architecture.pptx
@@ -292,7 +292,7 @@
           <a:lstStyle/>
           <a:p>
             <a:r>
-              <a:t>Why the platform exists, how decisions are governed, the business scope and boundary, the Adam persona, the workflow catalogue, and the value case. 26 ADRs: D0 (4), D1 (12), D8 (10).</a:t>
+              <a:t>Why the platform exists, how decisions are governed, the business scope and boundary, the PFF Chat AI persona, the workflow catalogue, and the value case. 26 ADRs: D0 (4), D1 (12), D8 (10).</a:t>
             </a:r>
           </a:p>
         </p:txBody>
@@ -338,7 +338,7 @@
           <a:lstStyle/>
           <a:p>
             <a:r>
-              <a:t>The canonical flow: club checks → select teams &amp; fees → insurance → other products → summary &amp; submit → routing (auto-approve or CFA review HIL) → invoice/payment → COMPLETE → WGS sync. 27 scenarios incl. payment-fail reconciliation. Adam only confirms success when the enterprise confirms it.</a:t>
+              <a:t>The canonical flow: club checks → select teams &amp; fees → insurance → other products → summary &amp; submit → routing (auto-approve or CFA review HIL) → invoice/payment → COMPLETE → WGS sync. 27 scenarios incl. payment-fail reconciliation. PFF Chat AI only confirms success when the enterprise confirms it.</a:t>
             </a:r>
           </a:p>
         </p:txBody>
@@ -798,7 +798,7 @@
           <a:lstStyle/>
           <a:p>
             <a:r>
-              <a:t>Adam is a workflow-first enterprise assistant with a natural commentary tone. Persona controls how Adam communicates, never what the result is.</a:t>
+              <a:t>PFF Chat AI is a workflow-first enterprise assistant with a natural commentary tone. Persona controls how PFF Chat AI communicates, never what the result is.</a:t>
             </a:r>
           </a:p>
         </p:txBody>
@@ -2035,7 +2035,7 @@
                 </a:solidFill>
                 <a:latin typeface="Calibri"/>
               </a:rPr>
-              <a:t>Adam narrates; PFF decides &amp; executes</a:t>
+              <a:t>PFF Chat AI narrates; PFF decides &amp; executes</a:t>
             </a:r>
           </a:p>
         </p:txBody>
@@ -3031,7 +3031,7 @@
                 </a:solidFill>
                 <a:latin typeface="Calibri"/>
               </a:rPr>
-              <a:t>27 scenarios covered (auto-approve, CFA approve/reject/cancel, £0, refund, fold, payment-fail reconciliation). Adam narrates state; PFF decides &amp; executes.</a:t>
+              <a:t>27 scenarios covered (auto-approve, CFA approve/reject/cancel, £0, refund, fold, payment-fail reconciliation). PFF Chat AI narrates state; PFF decides &amp; executes.</a:t>
             </a:r>
           </a:p>
         </p:txBody>
@@ -5900,7 +5900,7 @@
                           </a:solidFill>
                           <a:latin typeface="Calibri"/>
                         </a:rPr>
-                        <a:t>Adam AI persona charter — football-commentary…</a:t>
+                        <a:t>PFF Chat AI persona charter — football-commen…</a:t>
                       </a:r>
                     </a:p>
                   </a:txBody>
@@ -7798,7 +7798,7 @@
                 </a:solidFill>
                 <a:latin typeface="Calibri"/>
               </a:rPr>
-              <a:t>Adam persona model, access archetypes &amp; charter</a:t>
+              <a:t>PFF Chat AI persona model, access archetypes &amp; charter</a:t>
             </a:r>
           </a:p>
         </p:txBody>
@@ -11272,7 +11272,7 @@
                 </a:solidFill>
                 <a:latin typeface="Cambria"/>
               </a:rPr>
-              <a:t>Adam persona — model &amp; charter</a:t>
+              <a:t>PFF Chat AI persona — model &amp; charter</a:t>
             </a:r>
           </a:p>
         </p:txBody>
@@ -12984,7 +12984,7 @@
                 </a:solidFill>
                 <a:latin typeface="Calibri"/>
               </a:rPr>
-              <a:t>Adam clearly states who/what the workflow is waiting for during pending states.</a:t>
+              <a:t>PFF Chat AI clearly states who/what the workflow is waiting for during pending states.</a:t>
             </a:r>
           </a:p>
         </p:txBody>
